--- a/docs/Presentacion_Defensa_TFM.pptx
+++ b/docs/Presentacion_Defensa_TFM.pptx
@@ -2151,7 +2151,7 @@
           <a:lstStyle/>
           <a:p>
             <a:r>
-              <a:t>¿Qué aporta esto fuera de la academia? A la sociedad: menos fraude y menos clientes legítimos bloqueados sin motivo, con decisiones que se pueden explicar. A la banca: un criterio de selección claro, que mide falsas alarmas y coste además de detección, y un pipeline sin fuga de datos reutilizable. En mi trabajo en el banco, este protocolo se puede aplicar directamente sobre datos internos para comparar modelos antes de un piloto. Y para Ecuador: la interpretabilidad con SHAP encaja con las exigencias de trazabilidad de la Superintendencia de Bancos y la Ley de Protección de Datos. (~45 s)</a:t>
+              <a:t>¿Qué aporta esto fuera de la academia? A la sociedad: menos fraude y menos clientes legítimos bloqueados sin motivo, con decisiones que se pueden explicar. A la banca: un criterio de selección claro, que mide falsas alarmas y coste además de detección, y un pipeline sin fuga de datos reutilizable. En mi caso, trabajo en el área de tecnología del banco, en proyectos de tarjeta de crédito: este protocolo se puede aplicar a nuestros datos de autorizaciones para comparar modelos, e integrarlos como un servicio de scoring en un piloto en paralelo al sistema actual, sin afectar a las autorizaciones. Y para Ecuador: la interpretabilidad con SHAP encaja con las exigencias de trazabilidad de la Superintendencia de Bancos y la Ley de Protección de Datos. (~45 s)</a:t>
             </a:r>
           </a:p>
         </p:txBody>
